--- a/task501/golden/measles_readiness_2027.pptx
+++ b/task501/golden/measles_readiness_2027.pptx
@@ -3440,7 +3440,7 @@
                   <a:srgbClr val="5B6670"/>
                 </a:solidFill>
               </a:rPr>
-              <a:t>Dominant eigenvalue of the next-generation matrix: National Social Contact Survey 2023, national immunity profile May 2027, projection at 1 January 2028, scaled to R0 15 (PS-07 3.2).</a:t>
+              <a:t>Dominant eigenvalue of the next-generation matrix: National Social Contact Survey 2023 term-time diaries, national immunity profile May 2027, projection at 1 January 2028, scaled to R0 15 (PS-07 3.2).</a:t>
             </a:r>
           </a:p>
         </p:txBody>
@@ -3567,12 +3567,12 @@
               </a:spcAft>
             </a:pPr>
             <a:r>
-              <a:rPr sz="1800" b="0">
+              <a:rPr sz="1700" b="0">
                 <a:solidFill>
                   <a:srgbClr val="1F3A5F"/>
                 </a:solidFill>
               </a:rPr>
-              <a:t>The region is 94.6 per cent immune, above the 93.3 per cent that R0 15 needs, so on the average no catch-up looks needed (0.8).</a:t>
+              <a:t>The region is 95.2 per cent immune, above the 93.3 per cent that R0 15 needs, so on the average no catch-up looks needed (0.7).</a:t>
             </a:r>
           </a:p>
           <a:p>
@@ -3582,12 +3582,12 @@
               </a:spcAft>
             </a:pPr>
             <a:r>
-              <a:rPr sz="1800" b="0">
+              <a:rPr sz="1700" b="0">
                 <a:solidFill>
                   <a:srgbClr val="1D2329"/>
                 </a:solidFill>
               </a:rPr>
-              <a:t>But people do not mix at random. In the national contact survey about half of the contacts of 15 to 19-year-olds are with others of that age.</a:t>
+              <a:t>All the contact survey's diaries together give 0.9, but two thirds were kept in July and August with the schools closed. The winter runs in term.</a:t>
             </a:r>
           </a:p>
           <a:p>
@@ -3597,12 +3597,12 @@
               </a:spcAft>
             </a:pPr>
             <a:r>
-              <a:rPr sz="1800" b="0">
+              <a:rPr sz="1700" b="0">
                 <a:solidFill>
                   <a:srgbClr val="1D2329"/>
                 </a:solidFill>
               </a:rPr>
-              <a:t>The cohort born 2008 to 2012, whose uptake fell in the 2010-12 vaccine scare, is 15 to 19 on 1 January 2028 and 11.2 per cent susceptible, against 5.4 per cent across the region.</a:t>
+              <a:t>In the May diaries, kept in term, more than half of the contacts of 15 to 19-year-olds are with others of that age; in the summer diaries, under a fifth.</a:t>
             </a:r>
           </a:p>
           <a:p>
@@ -3612,12 +3612,12 @@
               </a:spcAft>
             </a:pPr>
             <a:r>
-              <a:rPr sz="1800" b="0">
+              <a:rPr sz="1700" b="0">
                 <a:solidFill>
                   <a:srgbClr val="1D2329"/>
                 </a:solidFill>
               </a:rPr>
-              <a:t>Chains of infection can run inside that group, which is why only option B takes the reproduction number below one. Options D and E reach the least immune adults and the most people, but adults mix too little with each other to move it.</a:t>
+              <a:t>The cohort born 2008 to 2012, whose uptake fell in the 2010-12 vaccine scare, is 15 to 19 on 1 January 2028 and 11.2 per cent susceptible, against 4.8 per cent across the region. In term, chains of infection run inside that group, so only option B takes the reproduction number below one; D and E reach the least immune adults and the most people and leave it at 1.3.</a:t>
             </a:r>
           </a:p>
         </p:txBody>
@@ -3655,7 +3655,7 @@
                   <a:srgbClr val="5B6670"/>
                 </a:solidFill>
               </a:rPr>
-              <a:t>National Social Contact Survey 2023, Table 2; national immunity profile, May 2027</a:t>
+              <a:t>National Social Contact Survey 2023 public use file; national immunity profile, May 2027</a:t>
             </a:r>
           </a:p>
         </p:txBody>
@@ -3964,7 +3964,7 @@
                             <a:srgbClr val="1D2329"/>
                           </a:solidFill>
                         </a:rPr>
-                        <a:t>3,542</a:t>
+                        <a:t>3,545</a:t>
                       </a:r>
                     </a:p>
                   </a:txBody>
@@ -3986,7 +3986,7 @@
                             <a:srgbClr val="1D2329"/>
                           </a:solidFill>
                         </a:rPr>
-                        <a:t>4,724</a:t>
+                        <a:t>4,720</a:t>
                       </a:r>
                     </a:p>
                   </a:txBody>
@@ -4097,7 +4097,7 @@
                             <a:srgbClr val="1D2329"/>
                           </a:solidFill>
                         </a:rPr>
-                        <a:t>4,285</a:t>
+                        <a:t>4,286</a:t>
                       </a:r>
                     </a:p>
                   </a:txBody>
@@ -4119,7 +4119,7 @@
                             <a:srgbClr val="1D2329"/>
                           </a:solidFill>
                         </a:rPr>
-                        <a:t>6,094</a:t>
+                        <a:t>6,091</a:t>
                       </a:r>
                     </a:p>
                   </a:txBody>
@@ -4230,7 +4230,7 @@
                             <a:srgbClr val="1D2329"/>
                           </a:solidFill>
                         </a:rPr>
-                        <a:t>2,859</a:t>
+                        <a:t>2,857</a:t>
                       </a:r>
                     </a:p>
                   </a:txBody>
@@ -4496,7 +4496,7 @@
                             <a:srgbClr val="1D2329"/>
                           </a:solidFill>
                         </a:rPr>
-                        <a:t>8,530</a:t>
+                        <a:t>8,526</a:t>
                       </a:r>
                     </a:p>
                   </a:txBody>
@@ -4518,7 +4518,7 @@
                             <a:srgbClr val="1D2329"/>
                           </a:solidFill>
                         </a:rPr>
-                        <a:t>11,788</a:t>
+                        <a:t>11,793</a:t>
                       </a:r>
                     </a:p>
                   </a:txBody>
@@ -4780,7 +4780,7 @@
                   <a:srgbClr val="1F3A5F"/>
                 </a:solidFill>
               </a:rPr>
-              <a:t>PS-07 section 3: R0 15, the winter assessed on 1 January 2028, immunity from the national profile, each option counted for the people the options paper expects it to make immune.</a:t>
+              <a:t>PS-07 section 3: the reproduction number below one throughout the winter, December to February, with R0 15 over the winter; population and immunity on 1 January 2028 from the national profile; each option counted for the people the options paper expects it to make immune.</a:t>
             </a:r>
           </a:p>
           <a:p>
@@ -4795,7 +4795,7 @@
                   <a:srgbClr val="1D2329"/>
                 </a:solidFill>
               </a:rPr>
-              <a:t>Next-generation matrix: contacts per day by age group (survey Table 2) times each age group's susceptible share, scaled so a wholly susceptible region gives 15; the reproduction number is its dominant eigenvalue.</a:t>
+              <a:t>Next-generation matrix: contacts per day by age band from the survey's term-time diaries (2 to 26 May 2023) times each band's susceptible share, scaled so a wholly susceptible region gives 15; the reproduction number is its dominant eigenvalue, which has to stay below one through the term weeks of the winter (PS-07 3.1).</a:t>
             </a:r>
           </a:p>
           <a:p>
@@ -4810,7 +4810,7 @@
                   <a:srgbClr val="1D2329"/>
                 </a:solidFill>
               </a:rPr>
-              <a:t>Register: local health office codes read in the scheme in force when recorded; events through the merge table; GP return lines replaced or withdrawn removed; doses counted under guidelines 12.5.</a:t>
+              <a:t>Register: addresses in Northern Ireland are outside the region; local health office codes read in the scheme in force when recorded; events through the merge table; GP return lines replaced or withdrawn removed; doses counted under guidelines 12.5.</a:t>
             </a:r>
           </a:p>
           <a:p>
@@ -4825,7 +4825,7 @@
                   <a:srgbClr val="1D2329"/>
                 </a:solidFill>
               </a:rPr>
-              <a:t>Cases: notifiable disease system extract of 6 July 2027; the 2019 outbreak's back-entered records counted once.</a:t>
+              <a:t>Cases: notifiable disease system extract of 6 July 2027; the 2019 outbreak's back-entered records and cases notified twice counted once.</a:t>
             </a:r>
           </a:p>
         </p:txBody>
